--- a/YahooAnswers_Presentacion_AmaglianiAviles.pptx
+++ b/YahooAnswers_Presentacion_AmaglianiAviles.pptx
@@ -1849,6 +1849,47 @@
           </a:p>
         </p:txBody>
       </p:sp>
+      <p:pic>
+        <p:nvPicPr>
+          <p:cNvPr id="25" name="Camera 24">
+            <a:extLst>
+              <a:ext uri="{FF2B5EF4-FFF2-40B4-BE49-F238E27FC236}">
+                <a16:creationId xmlns:a16="http://schemas.microsoft.com/office/drawing/2014/main" id="{CA29ED5B-8897-D5A5-0551-BAF8B1080C5C}"/>
+              </a:ext>
+            </a:extLst>
+          </p:cNvPr>
+          <p:cNvPicPr>
+            <a:picLocks noChangeAspect="1"/>
+            <a:extLst>
+              <a:ext uri="{51228E76-BA90-4043-B771-695A4F85340A}">
+                <alf:liveFeedProps xmlns:alf="http://schemas.microsoft.com/office/drawing/2021/livefeed"/>
+              </a:ext>
+            </a:extLst>
+          </p:cNvPicPr>
+          <p:nvPr/>
+        </p:nvPicPr>
+        <p:blipFill>
+          <a:blip r:embed="rId3">
+            <a:extLst>
+              <a:ext uri="{96DAC541-7B7A-43D3-8B79-37D633B846F1}">
+                <asvg:svgBlip xmlns:asvg="http://schemas.microsoft.com/office/drawing/2016/SVG/main" r:embed="rId4"/>
+              </a:ext>
+            </a:extLst>
+          </a:blip>
+          <a:stretch>
+            <a:fillRect/>
+          </a:stretch>
+        </p:blipFill>
+        <p:spPr>
+          <a:xfrm flipH="1">
+            <a:off x="7863840" y="76962"/>
+            <a:ext cx="1226058" cy="1226058"/>
+          </a:xfrm>
+          <a:prstGeom prst="ellipse">
+            <a:avLst/>
+          </a:prstGeom>
+        </p:spPr>
+      </p:pic>
     </p:spTree>
   </p:cSld>
   <p:clrMapOvr>
@@ -3368,6 +3409,47 @@
           </a:p>
         </p:txBody>
       </p:sp>
+      <p:pic>
+        <p:nvPicPr>
+          <p:cNvPr id="59" name="Camera 58">
+            <a:extLst>
+              <a:ext uri="{FF2B5EF4-FFF2-40B4-BE49-F238E27FC236}">
+                <a16:creationId xmlns:a16="http://schemas.microsoft.com/office/drawing/2014/main" id="{39945E5E-49A9-6078-B1D0-B5D08D7A39F0}"/>
+              </a:ext>
+            </a:extLst>
+          </p:cNvPr>
+          <p:cNvPicPr>
+            <a:picLocks noChangeAspect="1"/>
+            <a:extLst>
+              <a:ext uri="{51228E76-BA90-4043-B771-695A4F85340A}">
+                <alf:liveFeedProps xmlns:alf="http://schemas.microsoft.com/office/drawing/2021/livefeed"/>
+              </a:ext>
+            </a:extLst>
+          </p:cNvPicPr>
+          <p:nvPr/>
+        </p:nvPicPr>
+        <p:blipFill>
+          <a:blip r:embed="rId3">
+            <a:extLst>
+              <a:ext uri="{96DAC541-7B7A-43D3-8B79-37D633B846F1}">
+                <asvg:svgBlip xmlns:asvg="http://schemas.microsoft.com/office/drawing/2016/SVG/main" r:embed="rId4"/>
+              </a:ext>
+            </a:extLst>
+          </a:blip>
+          <a:stretch>
+            <a:fillRect/>
+          </a:stretch>
+        </p:blipFill>
+        <p:spPr>
+          <a:xfrm>
+            <a:off x="7863840" y="76962"/>
+            <a:ext cx="1226058" cy="1226058"/>
+          </a:xfrm>
+          <a:prstGeom prst="ellipse">
+            <a:avLst/>
+          </a:prstGeom>
+        </p:spPr>
+      </p:pic>
     </p:spTree>
   </p:cSld>
   <p:clrMapOvr>
@@ -4931,6 +5013,47 @@
           </a:p>
         </p:txBody>
       </p:sp>
+      <p:pic>
+        <p:nvPicPr>
+          <p:cNvPr id="52" name="Camera 51">
+            <a:extLst>
+              <a:ext uri="{FF2B5EF4-FFF2-40B4-BE49-F238E27FC236}">
+                <a16:creationId xmlns:a16="http://schemas.microsoft.com/office/drawing/2014/main" id="{D8D42142-0A01-73C9-AE98-F9D716AB8EA3}"/>
+              </a:ext>
+            </a:extLst>
+          </p:cNvPr>
+          <p:cNvPicPr>
+            <a:picLocks noChangeAspect="1"/>
+            <a:extLst>
+              <a:ext uri="{51228E76-BA90-4043-B771-695A4F85340A}">
+                <alf:liveFeedProps xmlns:alf="http://schemas.microsoft.com/office/drawing/2021/livefeed"/>
+              </a:ext>
+            </a:extLst>
+          </p:cNvPicPr>
+          <p:nvPr/>
+        </p:nvPicPr>
+        <p:blipFill>
+          <a:blip r:embed="rId3">
+            <a:extLst>
+              <a:ext uri="{96DAC541-7B7A-43D3-8B79-37D633B846F1}">
+                <asvg:svgBlip xmlns:asvg="http://schemas.microsoft.com/office/drawing/2016/SVG/main" r:embed="rId4"/>
+              </a:ext>
+            </a:extLst>
+          </a:blip>
+          <a:stretch>
+            <a:fillRect/>
+          </a:stretch>
+        </p:blipFill>
+        <p:spPr>
+          <a:xfrm>
+            <a:off x="7863840" y="76962"/>
+            <a:ext cx="1226058" cy="1226058"/>
+          </a:xfrm>
+          <a:prstGeom prst="ellipse">
+            <a:avLst/>
+          </a:prstGeom>
+        </p:spPr>
+      </p:pic>
     </p:spTree>
   </p:cSld>
   <p:clrMapOvr>
@@ -7702,6 +7825,47 @@
           </a:p>
         </p:txBody>
       </p:sp>
+      <p:pic>
+        <p:nvPicPr>
+          <p:cNvPr id="94" name="Camera 93">
+            <a:extLst>
+              <a:ext uri="{FF2B5EF4-FFF2-40B4-BE49-F238E27FC236}">
+                <a16:creationId xmlns:a16="http://schemas.microsoft.com/office/drawing/2014/main" id="{71DBEF16-1446-4795-DF64-236F7BA09954}"/>
+              </a:ext>
+            </a:extLst>
+          </p:cNvPr>
+          <p:cNvPicPr>
+            <a:picLocks noChangeAspect="1"/>
+            <a:extLst>
+              <a:ext uri="{51228E76-BA90-4043-B771-695A4F85340A}">
+                <alf:liveFeedProps xmlns:alf="http://schemas.microsoft.com/office/drawing/2021/livefeed"/>
+              </a:ext>
+            </a:extLst>
+          </p:cNvPicPr>
+          <p:nvPr/>
+        </p:nvPicPr>
+        <p:blipFill>
+          <a:blip r:embed="rId3">
+            <a:extLst>
+              <a:ext uri="{96DAC541-7B7A-43D3-8B79-37D633B846F1}">
+                <asvg:svgBlip xmlns:asvg="http://schemas.microsoft.com/office/drawing/2016/SVG/main" r:embed="rId4"/>
+              </a:ext>
+            </a:extLst>
+          </a:blip>
+          <a:stretch>
+            <a:fillRect/>
+          </a:stretch>
+        </p:blipFill>
+        <p:spPr>
+          <a:xfrm>
+            <a:off x="7863840" y="76962"/>
+            <a:ext cx="1226058" cy="1226058"/>
+          </a:xfrm>
+          <a:prstGeom prst="ellipse">
+            <a:avLst/>
+          </a:prstGeom>
+        </p:spPr>
+      </p:pic>
     </p:spTree>
   </p:cSld>
   <p:clrMapOvr>
@@ -9012,6 +9176,47 @@
           </a:p>
         </p:txBody>
       </p:sp>
+      <p:pic>
+        <p:nvPicPr>
+          <p:cNvPr id="47" name="Camera 46">
+            <a:extLst>
+              <a:ext uri="{FF2B5EF4-FFF2-40B4-BE49-F238E27FC236}">
+                <a16:creationId xmlns:a16="http://schemas.microsoft.com/office/drawing/2014/main" id="{1D078FC9-75B5-5FA4-A157-F86E0E40E2B4}"/>
+              </a:ext>
+            </a:extLst>
+          </p:cNvPr>
+          <p:cNvPicPr>
+            <a:picLocks noChangeAspect="1"/>
+            <a:extLst>
+              <a:ext uri="{51228E76-BA90-4043-B771-695A4F85340A}">
+                <alf:liveFeedProps xmlns:alf="http://schemas.microsoft.com/office/drawing/2021/livefeed"/>
+              </a:ext>
+            </a:extLst>
+          </p:cNvPicPr>
+          <p:nvPr/>
+        </p:nvPicPr>
+        <p:blipFill>
+          <a:blip r:embed="rId3">
+            <a:extLst>
+              <a:ext uri="{96DAC541-7B7A-43D3-8B79-37D633B846F1}">
+                <asvg:svgBlip xmlns:asvg="http://schemas.microsoft.com/office/drawing/2016/SVG/main" r:embed="rId4"/>
+              </a:ext>
+            </a:extLst>
+          </a:blip>
+          <a:stretch>
+            <a:fillRect/>
+          </a:stretch>
+        </p:blipFill>
+        <p:spPr>
+          <a:xfrm>
+            <a:off x="7863840" y="76962"/>
+            <a:ext cx="1226058" cy="1226058"/>
+          </a:xfrm>
+          <a:prstGeom prst="ellipse">
+            <a:avLst/>
+          </a:prstGeom>
+        </p:spPr>
+      </p:pic>
     </p:spTree>
   </p:cSld>
   <p:clrMapOvr>
@@ -10739,6 +10944,47 @@
           </a:p>
         </p:txBody>
       </p:sp>
+      <p:pic>
+        <p:nvPicPr>
+          <p:cNvPr id="50" name="Camera 49">
+            <a:extLst>
+              <a:ext uri="{FF2B5EF4-FFF2-40B4-BE49-F238E27FC236}">
+                <a16:creationId xmlns:a16="http://schemas.microsoft.com/office/drawing/2014/main" id="{8BEAB868-FF2F-2274-25D2-A7583AFCD810}"/>
+              </a:ext>
+            </a:extLst>
+          </p:cNvPr>
+          <p:cNvPicPr>
+            <a:picLocks noChangeAspect="1"/>
+            <a:extLst>
+              <a:ext uri="{51228E76-BA90-4043-B771-695A4F85340A}">
+                <alf:liveFeedProps xmlns:alf="http://schemas.microsoft.com/office/drawing/2021/livefeed"/>
+              </a:ext>
+            </a:extLst>
+          </p:cNvPicPr>
+          <p:nvPr/>
+        </p:nvPicPr>
+        <p:blipFill>
+          <a:blip r:embed="rId3">
+            <a:extLst>
+              <a:ext uri="{96DAC541-7B7A-43D3-8B79-37D633B846F1}">
+                <asvg:svgBlip xmlns:asvg="http://schemas.microsoft.com/office/drawing/2016/SVG/main" r:embed="rId4"/>
+              </a:ext>
+            </a:extLst>
+          </a:blip>
+          <a:stretch>
+            <a:fillRect/>
+          </a:stretch>
+        </p:blipFill>
+        <p:spPr>
+          <a:xfrm>
+            <a:off x="7863840" y="76962"/>
+            <a:ext cx="1226058" cy="1226058"/>
+          </a:xfrm>
+          <a:prstGeom prst="ellipse">
+            <a:avLst/>
+          </a:prstGeom>
+        </p:spPr>
+      </p:pic>
     </p:spTree>
   </p:cSld>
   <p:clrMapOvr>
@@ -13773,6 +14019,47 @@
           </a:p>
         </p:txBody>
       </p:sp>
+      <p:pic>
+        <p:nvPicPr>
+          <p:cNvPr id="90" name="Camera 89">
+            <a:extLst>
+              <a:ext uri="{FF2B5EF4-FFF2-40B4-BE49-F238E27FC236}">
+                <a16:creationId xmlns:a16="http://schemas.microsoft.com/office/drawing/2014/main" id="{21E70694-F832-38DC-6B5A-4DC392022BE3}"/>
+              </a:ext>
+            </a:extLst>
+          </p:cNvPr>
+          <p:cNvPicPr>
+            <a:picLocks noChangeAspect="1"/>
+            <a:extLst>
+              <a:ext uri="{51228E76-BA90-4043-B771-695A4F85340A}">
+                <alf:liveFeedProps xmlns:alf="http://schemas.microsoft.com/office/drawing/2021/livefeed"/>
+              </a:ext>
+            </a:extLst>
+          </p:cNvPicPr>
+          <p:nvPr/>
+        </p:nvPicPr>
+        <p:blipFill>
+          <a:blip r:embed="rId3">
+            <a:extLst>
+              <a:ext uri="{96DAC541-7B7A-43D3-8B79-37D633B846F1}">
+                <asvg:svgBlip xmlns:asvg="http://schemas.microsoft.com/office/drawing/2016/SVG/main" r:embed="rId4"/>
+              </a:ext>
+            </a:extLst>
+          </a:blip>
+          <a:stretch>
+            <a:fillRect/>
+          </a:stretch>
+        </p:blipFill>
+        <p:spPr>
+          <a:xfrm>
+            <a:off x="7863840" y="76962"/>
+            <a:ext cx="1226058" cy="1226058"/>
+          </a:xfrm>
+          <a:prstGeom prst="ellipse">
+            <a:avLst/>
+          </a:prstGeom>
+        </p:spPr>
+      </p:pic>
     </p:spTree>
   </p:cSld>
   <p:clrMapOvr>
@@ -15453,6 +15740,47 @@
           </a:p>
         </p:txBody>
       </p:sp>
+      <p:pic>
+        <p:nvPicPr>
+          <p:cNvPr id="56" name="Camera 55">
+            <a:extLst>
+              <a:ext uri="{FF2B5EF4-FFF2-40B4-BE49-F238E27FC236}">
+                <a16:creationId xmlns:a16="http://schemas.microsoft.com/office/drawing/2014/main" id="{5DEB1BA8-5871-2196-3585-9AC7C018A717}"/>
+              </a:ext>
+            </a:extLst>
+          </p:cNvPr>
+          <p:cNvPicPr>
+            <a:picLocks noChangeAspect="1"/>
+            <a:extLst>
+              <a:ext uri="{51228E76-BA90-4043-B771-695A4F85340A}">
+                <alf:liveFeedProps xmlns:alf="http://schemas.microsoft.com/office/drawing/2021/livefeed"/>
+              </a:ext>
+            </a:extLst>
+          </p:cNvPicPr>
+          <p:nvPr/>
+        </p:nvPicPr>
+        <p:blipFill>
+          <a:blip r:embed="rId3">
+            <a:extLst>
+              <a:ext uri="{96DAC541-7B7A-43D3-8B79-37D633B846F1}">
+                <asvg:svgBlip xmlns:asvg="http://schemas.microsoft.com/office/drawing/2016/SVG/main" r:embed="rId4"/>
+              </a:ext>
+            </a:extLst>
+          </a:blip>
+          <a:stretch>
+            <a:fillRect/>
+          </a:stretch>
+        </p:blipFill>
+        <p:spPr>
+          <a:xfrm>
+            <a:off x="7863840" y="76962"/>
+            <a:ext cx="1226058" cy="1226058"/>
+          </a:xfrm>
+          <a:prstGeom prst="ellipse">
+            <a:avLst/>
+          </a:prstGeom>
+        </p:spPr>
+      </p:pic>
     </p:spTree>
   </p:cSld>
   <p:clrMapOvr>
@@ -15873,6 +16201,47 @@
           </a:p>
         </p:txBody>
       </p:sp>
+      <p:pic>
+        <p:nvPicPr>
+          <p:cNvPr id="20" name="Camera 19">
+            <a:extLst>
+              <a:ext uri="{FF2B5EF4-FFF2-40B4-BE49-F238E27FC236}">
+                <a16:creationId xmlns:a16="http://schemas.microsoft.com/office/drawing/2014/main" id="{3B7097F1-D311-F6FD-C111-FEC85F0718D4}"/>
+              </a:ext>
+            </a:extLst>
+          </p:cNvPr>
+          <p:cNvPicPr>
+            <a:picLocks noChangeAspect="1"/>
+            <a:extLst>
+              <a:ext uri="{51228E76-BA90-4043-B771-695A4F85340A}">
+                <alf:liveFeedProps xmlns:alf="http://schemas.microsoft.com/office/drawing/2021/livefeed"/>
+              </a:ext>
+            </a:extLst>
+          </p:cNvPicPr>
+          <p:nvPr/>
+        </p:nvPicPr>
+        <p:blipFill>
+          <a:blip r:embed="rId3">
+            <a:extLst>
+              <a:ext uri="{96DAC541-7B7A-43D3-8B79-37D633B846F1}">
+                <asvg:svgBlip xmlns:asvg="http://schemas.microsoft.com/office/drawing/2016/SVG/main" r:embed="rId4"/>
+              </a:ext>
+            </a:extLst>
+          </a:blip>
+          <a:stretch>
+            <a:fillRect/>
+          </a:stretch>
+        </p:blipFill>
+        <p:spPr>
+          <a:xfrm>
+            <a:off x="7863840" y="76962"/>
+            <a:ext cx="1226058" cy="1226058"/>
+          </a:xfrm>
+          <a:prstGeom prst="ellipse">
+            <a:avLst/>
+          </a:prstGeom>
+        </p:spPr>
+      </p:pic>
     </p:spTree>
   </p:cSld>
   <p:clrMapOvr>
